--- a/workshop/Better-by-Default.pptx
+++ b/workshop/Better-by-Default.pptx
@@ -634,7 +634,7 @@
               <a:t>XML-RPC is a legitimate but aging API. (Mad love to Dave Winer!) It's not a backdoor or an emergency. It is an old switchboard where every method is a phone line. Rather than rip out a connection that Jetpack or a publishing client may need, we unplug unused lines by category. Four switches, all off by default:
 1. Pingbacks — drop pingback.ping *and* pingback.extensions.getPingbacks, the clearest live nuisance and reflection-DDoS surface. A valid call performs database work, waits a second (core really does sleep( 1 ), to let the pinging post finish publishing), and then fetches the claimed source URL — which is the whole trick: a request that costs the attacker nothing costs you a database write, a pause and an outbound fetch to a URL they chose. BBD also strips the X-Pingback response header, because a site that has removed the method while still advertising where to send one is still telling every scanner it accepts pingbacks.
 2. Remote publishing — drop the credential-authenticated blogging methods (wp.*, metaWeblog.*, mt.*, blogger.*), another password-guessing entrance when legacy clients are not needed. This also flips xmlrpc_enabled off and removes the RSD discovery link.
-3. system.multicall — refuse a general batching wrapper with little established modern use. WordPress 4.4 prevented it from being used as a password-guessing multiplier, so the old 'thousands of guesses' story is obsolete. (To this day, people say XML-RPC is some kind of open, free credential verification oracle — NOT TRUE.) Multicall can still batch other work, including pingbacks, but it does not enable pingback abuse.
+3. system.multicall — refuse general batching except requests Jetpack verifies as signed by WordPress.com. WordPress.com legitimately uses multicall to manage Jetpack-connected sites. WordPress 4.4 prevented it from being used as a password-guessing multiplier, so the old 'thousands of guesses' story is obsolete. (To this day, people say XML-RPC is some kind of open, free credential verification oracle — NOT TRUE.) Multicall can still batch other work, including pingbacks, but it does not enable pingback abuse.
 4. Block the endpoint — the blunt hammer: xmlrpc.php returns 403 for everything. Prefer doing this at the CDN, WAF, or web server so the request never consumes PHP.
 The first three are surgical and leave third-party registrations such as Jetpack's jetpack.* in place. That is not a compatibility guarantee: keep the endpoint reachable, leave Remote Publishing enabled until testing proves it unnecessary, and test the Jetpack connection and features after method changes. Block the endpoint only when nothing on the site speaks XML-RPC.
 [Aside — what's "IXR"? The Incutio XML-RPC library. Simon Willison released it in September 2002, one of his first open-source projects, while blogging from the University of Bath; both WordPress *and* Drupal adopted it, and it then sat largely untouched for 15+ years — long enough to pick up a CVE. Willison went on to co-create Django (2003–05 at the Lawrence Journal-World), build Lanyrd (sold to Eventbrite in 2013) and Datasette (2017), and is now one of the most-read writers on LLMs.]</a:t>

--- a/workshop/Better-by-Default.pptx
+++ b/workshop/Better-by-Default.pptx
@@ -2866,7 +2866,7 @@
           <a:p>
             <a:r>
               <a:rPr lang="en-US" dirty="0"/>
-              <a:t>AI connectors are disabled through the WordPress 7.0 core gate and the Connectors screen is closed. Baseline headers and SAMEORIGIN ship separately because framing can break legitimate embeds. BBD governs core release classes unless a constant wins, while language files and plugin/theme code remain with WordPress, the host, or fleet tooling.</a:t>
+              <a:t>AI connectors are disabled through the WordPress 7.0 core gate and the core Connectors screen is closed. Jetpack follows the same gate, so Jetpack AI Assistant and its other AI features are disabled too. Gutenberg can provide a separate Connectors screen, which BBD does not close. Baseline headers and SAMEORIGIN ship separately because framing can break legitimate embeds. BBD governs core release classes unless a constant wins, while language files and plugin/theme code remain with WordPress, the host, or fleet tooling.</a:t>
             </a:r>
             <a:endParaRPr lang="en-US" dirty="0"/>
           </a:p>

--- a/workshop/Better-by-Default.pptx
+++ b/workshop/Better-by-Default.pptx
@@ -3842,7 +3842,7 @@
           <a:p>
             <a:r>
               <a:rPr lang="en-US" dirty="0"/>
-              <a:t>This is a debugging model, not a universal 'last plugin wins' rule. Constants cannot be redefined; filters pass a value through every callback; actions may accumulate effects. wp-config.php is loaded before plugins. Must-use plugins load before normal plugins. Normal plugins are included in the stored active_plugins order — PMP before BBD on this demo site. Within a hook, lower priorities run earlier, higher priorities later, and equal priorities retain registration order. Sources: https://developer.wordpress.org/advanced-administration/plugins/mu-plugins/ ; https://developer.wordpress.org/plugins/hooks/actions/#priority ; https://developer.wordpress.org/reference/functions/wp_get_active_and_valid_plugins/ ; https://developer.wordpress.org/advanced-administration/wordpress/wp-config/</a:t>
+              <a:t>This is a debugging model, not a universal 'last plugin wins' rule. Constants cannot be redefined; filters pass a value through every callback; actions may accumulate effects. wp-config.php is loaded before plugins. Must-use plugins load before normal plugins. Normal plugins are included in the stored active_plugins order — AX before BBD on this demo site. Within a hook, lower priorities run earlier, higher priorities later, and equal priorities retain registration order. Sources: https://developer.wordpress.org/advanced-administration/plugins/mu-plugins/ ; https://developer.wordpress.org/plugins/hooks/actions/#priority ; https://developer.wordpress.org/reference/functions/wp_get_active_and_valid_plugins/ ; https://developer.wordpress.org/advanced-administration/wordpress/wp-config/</a:t>
             </a:r>
             <a:endParaRPr lang="en-US" dirty="0"/>
           </a:p>
@@ -33751,7 +33751,7 @@
                 <a:ea typeface="Calibri" pitchFamily="34" charset="-122"/>
                 <a:cs typeface="Calibri" pitchFamily="34" charset="-120"/>
               </a:rPr>
-              <a:t>Load in active_plugins order — PMP before BBD on this demo site.</a:t>
+              <a:t>Load in active_plugins order — AX before BBD on this demo site.</a:t>
             </a:r>
             <a:endParaRPr lang="en-US" sz="1400" dirty="0"/>
           </a:p>
